--- a/神羔羊是萬王之王.pptx
+++ b/神羔羊是萬王之王.pptx
@@ -165,7 +165,7 @@
           <a:lstStyle/>
           <a:p>
             <a:r>
-              <a:rPr lang="en-US" altLang="zh-TW" smtClean="0"/>
+              <a:rPr lang="en-US" altLang="zh-TW"/>
               <a:t>Click to edit Master title style</a:t>
             </a:r>
             <a:endParaRPr lang="zh-TW" altLang="en-US"/>
@@ -284,7 +284,7 @@
           </a:lstStyle>
           <a:p>
             <a:r>
-              <a:rPr lang="en-US" altLang="zh-TW" smtClean="0"/>
+              <a:rPr lang="en-US" altLang="zh-TW"/>
               <a:t>Click to edit Master subtitle style</a:t>
             </a:r>
             <a:endParaRPr lang="zh-TW" altLang="en-US"/>
@@ -308,7 +308,7 @@
           <a:p>
             <a:fld id="{2135634C-2FAC-4703-B651-C048B2E56F83}" type="datetimeFigureOut">
               <a:rPr lang="en-US" smtClean="0"/>
-              <a:t>6/18/2022</a:t>
+              <a:t>3/23/2024</a:t>
             </a:fld>
             <a:endParaRPr lang="en-US"/>
           </a:p>
@@ -402,7 +402,7 @@
           <a:lstStyle/>
           <a:p>
             <a:r>
-              <a:rPr lang="en-US" altLang="zh-TW" smtClean="0"/>
+              <a:rPr lang="en-US" altLang="zh-TW"/>
               <a:t>Click to edit Master title style</a:t>
             </a:r>
             <a:endParaRPr lang="zh-TW" altLang="en-US"/>
@@ -426,35 +426,35 @@
           <a:p>
             <a:pPr lvl="0"/>
             <a:r>
-              <a:rPr lang="en-US" altLang="zh-TW" smtClean="0"/>
+              <a:rPr lang="en-US" altLang="zh-TW"/>
               <a:t>Edit Master text styles</a:t>
             </a:r>
           </a:p>
           <a:p>
             <a:pPr lvl="1"/>
             <a:r>
-              <a:rPr lang="en-US" altLang="zh-TW" smtClean="0"/>
+              <a:rPr lang="en-US" altLang="zh-TW"/>
               <a:t>Second level</a:t>
             </a:r>
           </a:p>
           <a:p>
             <a:pPr lvl="2"/>
             <a:r>
-              <a:rPr lang="en-US" altLang="zh-TW" smtClean="0"/>
+              <a:rPr lang="en-US" altLang="zh-TW"/>
               <a:t>Third level</a:t>
             </a:r>
           </a:p>
           <a:p>
             <a:pPr lvl="3"/>
             <a:r>
-              <a:rPr lang="en-US" altLang="zh-TW" smtClean="0"/>
+              <a:rPr lang="en-US" altLang="zh-TW"/>
               <a:t>Fourth level</a:t>
             </a:r>
           </a:p>
           <a:p>
             <a:pPr lvl="4"/>
             <a:r>
-              <a:rPr lang="en-US" altLang="zh-TW" smtClean="0"/>
+              <a:rPr lang="en-US" altLang="zh-TW"/>
               <a:t>Fifth level</a:t>
             </a:r>
             <a:endParaRPr lang="zh-TW" altLang="en-US"/>
@@ -478,7 +478,7 @@
           <a:p>
             <a:fld id="{2135634C-2FAC-4703-B651-C048B2E56F83}" type="datetimeFigureOut">
               <a:rPr lang="en-US" smtClean="0"/>
-              <a:t>6/18/2022</a:t>
+              <a:t>3/23/2024</a:t>
             </a:fld>
             <a:endParaRPr lang="en-US"/>
           </a:p>
@@ -577,7 +577,7 @@
           <a:lstStyle/>
           <a:p>
             <a:r>
-              <a:rPr lang="en-US" altLang="zh-TW" smtClean="0"/>
+              <a:rPr lang="en-US" altLang="zh-TW"/>
               <a:t>Click to edit Master title style</a:t>
             </a:r>
             <a:endParaRPr lang="zh-TW" altLang="en-US"/>
@@ -606,35 +606,35 @@
           <a:p>
             <a:pPr lvl="0"/>
             <a:r>
-              <a:rPr lang="en-US" altLang="zh-TW" smtClean="0"/>
+              <a:rPr lang="en-US" altLang="zh-TW"/>
               <a:t>Edit Master text styles</a:t>
             </a:r>
           </a:p>
           <a:p>
             <a:pPr lvl="1"/>
             <a:r>
-              <a:rPr lang="en-US" altLang="zh-TW" smtClean="0"/>
+              <a:rPr lang="en-US" altLang="zh-TW"/>
               <a:t>Second level</a:t>
             </a:r>
           </a:p>
           <a:p>
             <a:pPr lvl="2"/>
             <a:r>
-              <a:rPr lang="en-US" altLang="zh-TW" smtClean="0"/>
+              <a:rPr lang="en-US" altLang="zh-TW"/>
               <a:t>Third level</a:t>
             </a:r>
           </a:p>
           <a:p>
             <a:pPr lvl="3"/>
             <a:r>
-              <a:rPr lang="en-US" altLang="zh-TW" smtClean="0"/>
+              <a:rPr lang="en-US" altLang="zh-TW"/>
               <a:t>Fourth level</a:t>
             </a:r>
           </a:p>
           <a:p>
             <a:pPr lvl="4"/>
             <a:r>
-              <a:rPr lang="en-US" altLang="zh-TW" smtClean="0"/>
+              <a:rPr lang="en-US" altLang="zh-TW"/>
               <a:t>Fifth level</a:t>
             </a:r>
             <a:endParaRPr lang="zh-TW" altLang="en-US"/>
@@ -658,7 +658,7 @@
           <a:p>
             <a:fld id="{2135634C-2FAC-4703-B651-C048B2E56F83}" type="datetimeFigureOut">
               <a:rPr lang="en-US" smtClean="0"/>
-              <a:t>6/18/2022</a:t>
+              <a:t>3/23/2024</a:t>
             </a:fld>
             <a:endParaRPr lang="en-US"/>
           </a:p>
@@ -752,7 +752,7 @@
           <a:lstStyle/>
           <a:p>
             <a:r>
-              <a:rPr lang="en-US" altLang="zh-TW" smtClean="0"/>
+              <a:rPr lang="en-US" altLang="zh-TW"/>
               <a:t>Click to edit Master title style</a:t>
             </a:r>
             <a:endParaRPr lang="zh-TW" altLang="en-US"/>
@@ -776,35 +776,35 @@
           <a:p>
             <a:pPr lvl="0"/>
             <a:r>
-              <a:rPr lang="en-US" altLang="zh-TW" smtClean="0"/>
+              <a:rPr lang="en-US" altLang="zh-TW"/>
               <a:t>Edit Master text styles</a:t>
             </a:r>
           </a:p>
           <a:p>
             <a:pPr lvl="1"/>
             <a:r>
-              <a:rPr lang="en-US" altLang="zh-TW" smtClean="0"/>
+              <a:rPr lang="en-US" altLang="zh-TW"/>
               <a:t>Second level</a:t>
             </a:r>
           </a:p>
           <a:p>
             <a:pPr lvl="2"/>
             <a:r>
-              <a:rPr lang="en-US" altLang="zh-TW" smtClean="0"/>
+              <a:rPr lang="en-US" altLang="zh-TW"/>
               <a:t>Third level</a:t>
             </a:r>
           </a:p>
           <a:p>
             <a:pPr lvl="3"/>
             <a:r>
-              <a:rPr lang="en-US" altLang="zh-TW" smtClean="0"/>
+              <a:rPr lang="en-US" altLang="zh-TW"/>
               <a:t>Fourth level</a:t>
             </a:r>
           </a:p>
           <a:p>
             <a:pPr lvl="4"/>
             <a:r>
-              <a:rPr lang="en-US" altLang="zh-TW" smtClean="0"/>
+              <a:rPr lang="en-US" altLang="zh-TW"/>
               <a:t>Fifth level</a:t>
             </a:r>
             <a:endParaRPr lang="zh-TW" altLang="en-US"/>
@@ -828,7 +828,7 @@
           <a:p>
             <a:fld id="{2135634C-2FAC-4703-B651-C048B2E56F83}" type="datetimeFigureOut">
               <a:rPr lang="en-US" smtClean="0"/>
-              <a:t>6/18/2022</a:t>
+              <a:t>3/23/2024</a:t>
             </a:fld>
             <a:endParaRPr lang="en-US"/>
           </a:p>
@@ -931,7 +931,7 @@
           </a:lstStyle>
           <a:p>
             <a:r>
-              <a:rPr lang="en-US" altLang="zh-TW" smtClean="0"/>
+              <a:rPr lang="en-US" altLang="zh-TW"/>
               <a:t>Click to edit Master title style</a:t>
             </a:r>
             <a:endParaRPr lang="zh-TW" altLang="en-US"/>
@@ -1051,7 +1051,7 @@
           <a:p>
             <a:pPr lvl="0"/>
             <a:r>
-              <a:rPr lang="en-US" altLang="zh-TW" smtClean="0"/>
+              <a:rPr lang="en-US" altLang="zh-TW"/>
               <a:t>Edit Master text styles</a:t>
             </a:r>
           </a:p>
@@ -1074,7 +1074,7 @@
           <a:p>
             <a:fld id="{2135634C-2FAC-4703-B651-C048B2E56F83}" type="datetimeFigureOut">
               <a:rPr lang="en-US" smtClean="0"/>
-              <a:t>6/18/2022</a:t>
+              <a:t>3/23/2024</a:t>
             </a:fld>
             <a:endParaRPr lang="en-US"/>
           </a:p>
@@ -1168,7 +1168,7 @@
           <a:lstStyle/>
           <a:p>
             <a:r>
-              <a:rPr lang="en-US" altLang="zh-TW" smtClean="0"/>
+              <a:rPr lang="en-US" altLang="zh-TW"/>
               <a:t>Click to edit Master title style</a:t>
             </a:r>
             <a:endParaRPr lang="zh-TW" altLang="en-US"/>
@@ -1225,35 +1225,35 @@
           <a:p>
             <a:pPr lvl="0"/>
             <a:r>
-              <a:rPr lang="en-US" altLang="zh-TW" smtClean="0"/>
+              <a:rPr lang="en-US" altLang="zh-TW"/>
               <a:t>Edit Master text styles</a:t>
             </a:r>
           </a:p>
           <a:p>
             <a:pPr lvl="1"/>
             <a:r>
-              <a:rPr lang="en-US" altLang="zh-TW" smtClean="0"/>
+              <a:rPr lang="en-US" altLang="zh-TW"/>
               <a:t>Second level</a:t>
             </a:r>
           </a:p>
           <a:p>
             <a:pPr lvl="2"/>
             <a:r>
-              <a:rPr lang="en-US" altLang="zh-TW" smtClean="0"/>
+              <a:rPr lang="en-US" altLang="zh-TW"/>
               <a:t>Third level</a:t>
             </a:r>
           </a:p>
           <a:p>
             <a:pPr lvl="3"/>
             <a:r>
-              <a:rPr lang="en-US" altLang="zh-TW" smtClean="0"/>
+              <a:rPr lang="en-US" altLang="zh-TW"/>
               <a:t>Fourth level</a:t>
             </a:r>
           </a:p>
           <a:p>
             <a:pPr lvl="4"/>
             <a:r>
-              <a:rPr lang="en-US" altLang="zh-TW" smtClean="0"/>
+              <a:rPr lang="en-US" altLang="zh-TW"/>
               <a:t>Fifth level</a:t>
             </a:r>
             <a:endParaRPr lang="zh-TW" altLang="en-US"/>
@@ -1310,35 +1310,35 @@
           <a:p>
             <a:pPr lvl="0"/>
             <a:r>
-              <a:rPr lang="en-US" altLang="zh-TW" smtClean="0"/>
+              <a:rPr lang="en-US" altLang="zh-TW"/>
               <a:t>Edit Master text styles</a:t>
             </a:r>
           </a:p>
           <a:p>
             <a:pPr lvl="1"/>
             <a:r>
-              <a:rPr lang="en-US" altLang="zh-TW" smtClean="0"/>
+              <a:rPr lang="en-US" altLang="zh-TW"/>
               <a:t>Second level</a:t>
             </a:r>
           </a:p>
           <a:p>
             <a:pPr lvl="2"/>
             <a:r>
-              <a:rPr lang="en-US" altLang="zh-TW" smtClean="0"/>
+              <a:rPr lang="en-US" altLang="zh-TW"/>
               <a:t>Third level</a:t>
             </a:r>
           </a:p>
           <a:p>
             <a:pPr lvl="3"/>
             <a:r>
-              <a:rPr lang="en-US" altLang="zh-TW" smtClean="0"/>
+              <a:rPr lang="en-US" altLang="zh-TW"/>
               <a:t>Fourth level</a:t>
             </a:r>
           </a:p>
           <a:p>
             <a:pPr lvl="4"/>
             <a:r>
-              <a:rPr lang="en-US" altLang="zh-TW" smtClean="0"/>
+              <a:rPr lang="en-US" altLang="zh-TW"/>
               <a:t>Fifth level</a:t>
             </a:r>
             <a:endParaRPr lang="zh-TW" altLang="en-US"/>
@@ -1362,7 +1362,7 @@
           <a:p>
             <a:fld id="{2135634C-2FAC-4703-B651-C048B2E56F83}" type="datetimeFigureOut">
               <a:rPr lang="en-US" smtClean="0"/>
-              <a:t>6/18/2022</a:t>
+              <a:t>3/23/2024</a:t>
             </a:fld>
             <a:endParaRPr lang="en-US"/>
           </a:p>
@@ -1460,7 +1460,7 @@
           </a:lstStyle>
           <a:p>
             <a:r>
-              <a:rPr lang="en-US" altLang="zh-TW" smtClean="0"/>
+              <a:rPr lang="en-US" altLang="zh-TW"/>
               <a:t>Click to edit Master title style</a:t>
             </a:r>
             <a:endParaRPr lang="zh-TW" altLang="en-US"/>
@@ -1526,7 +1526,7 @@
           <a:p>
             <a:pPr lvl="0"/>
             <a:r>
-              <a:rPr lang="en-US" altLang="zh-TW" smtClean="0"/>
+              <a:rPr lang="en-US" altLang="zh-TW"/>
               <a:t>Edit Master text styles</a:t>
             </a:r>
           </a:p>
@@ -1582,35 +1582,35 @@
           <a:p>
             <a:pPr lvl="0"/>
             <a:r>
-              <a:rPr lang="en-US" altLang="zh-TW" smtClean="0"/>
+              <a:rPr lang="en-US" altLang="zh-TW"/>
               <a:t>Edit Master text styles</a:t>
             </a:r>
           </a:p>
           <a:p>
             <a:pPr lvl="1"/>
             <a:r>
-              <a:rPr lang="en-US" altLang="zh-TW" smtClean="0"/>
+              <a:rPr lang="en-US" altLang="zh-TW"/>
               <a:t>Second level</a:t>
             </a:r>
           </a:p>
           <a:p>
             <a:pPr lvl="2"/>
             <a:r>
-              <a:rPr lang="en-US" altLang="zh-TW" smtClean="0"/>
+              <a:rPr lang="en-US" altLang="zh-TW"/>
               <a:t>Third level</a:t>
             </a:r>
           </a:p>
           <a:p>
             <a:pPr lvl="3"/>
             <a:r>
-              <a:rPr lang="en-US" altLang="zh-TW" smtClean="0"/>
+              <a:rPr lang="en-US" altLang="zh-TW"/>
               <a:t>Fourth level</a:t>
             </a:r>
           </a:p>
           <a:p>
             <a:pPr lvl="4"/>
             <a:r>
-              <a:rPr lang="en-US" altLang="zh-TW" smtClean="0"/>
+              <a:rPr lang="en-US" altLang="zh-TW"/>
               <a:t>Fifth level</a:t>
             </a:r>
             <a:endParaRPr lang="zh-TW" altLang="en-US"/>
@@ -1676,7 +1676,7 @@
           <a:p>
             <a:pPr lvl="0"/>
             <a:r>
-              <a:rPr lang="en-US" altLang="zh-TW" smtClean="0"/>
+              <a:rPr lang="en-US" altLang="zh-TW"/>
               <a:t>Edit Master text styles</a:t>
             </a:r>
           </a:p>
@@ -1732,35 +1732,35 @@
           <a:p>
             <a:pPr lvl="0"/>
             <a:r>
-              <a:rPr lang="en-US" altLang="zh-TW" smtClean="0"/>
+              <a:rPr lang="en-US" altLang="zh-TW"/>
               <a:t>Edit Master text styles</a:t>
             </a:r>
           </a:p>
           <a:p>
             <a:pPr lvl="1"/>
             <a:r>
-              <a:rPr lang="en-US" altLang="zh-TW" smtClean="0"/>
+              <a:rPr lang="en-US" altLang="zh-TW"/>
               <a:t>Second level</a:t>
             </a:r>
           </a:p>
           <a:p>
             <a:pPr lvl="2"/>
             <a:r>
-              <a:rPr lang="en-US" altLang="zh-TW" smtClean="0"/>
+              <a:rPr lang="en-US" altLang="zh-TW"/>
               <a:t>Third level</a:t>
             </a:r>
           </a:p>
           <a:p>
             <a:pPr lvl="3"/>
             <a:r>
-              <a:rPr lang="en-US" altLang="zh-TW" smtClean="0"/>
+              <a:rPr lang="en-US" altLang="zh-TW"/>
               <a:t>Fourth level</a:t>
             </a:r>
           </a:p>
           <a:p>
             <a:pPr lvl="4"/>
             <a:r>
-              <a:rPr lang="en-US" altLang="zh-TW" smtClean="0"/>
+              <a:rPr lang="en-US" altLang="zh-TW"/>
               <a:t>Fifth level</a:t>
             </a:r>
             <a:endParaRPr lang="zh-TW" altLang="en-US"/>
@@ -1784,7 +1784,7 @@
           <a:p>
             <a:fld id="{2135634C-2FAC-4703-B651-C048B2E56F83}" type="datetimeFigureOut">
               <a:rPr lang="en-US" smtClean="0"/>
-              <a:t>6/18/2022</a:t>
+              <a:t>3/23/2024</a:t>
             </a:fld>
             <a:endParaRPr lang="en-US"/>
           </a:p>
@@ -1878,7 +1878,7 @@
           <a:lstStyle/>
           <a:p>
             <a:r>
-              <a:rPr lang="en-US" altLang="zh-TW" smtClean="0"/>
+              <a:rPr lang="en-US" altLang="zh-TW"/>
               <a:t>Click to edit Master title style</a:t>
             </a:r>
             <a:endParaRPr lang="zh-TW" altLang="en-US"/>
@@ -1902,7 +1902,7 @@
           <a:p>
             <a:fld id="{2135634C-2FAC-4703-B651-C048B2E56F83}" type="datetimeFigureOut">
               <a:rPr lang="en-US" smtClean="0"/>
-              <a:t>6/18/2022</a:t>
+              <a:t>3/23/2024</a:t>
             </a:fld>
             <a:endParaRPr lang="en-US"/>
           </a:p>
@@ -1997,7 +1997,7 @@
           <a:p>
             <a:fld id="{2135634C-2FAC-4703-B651-C048B2E56F83}" type="datetimeFigureOut">
               <a:rPr lang="en-US" smtClean="0"/>
-              <a:t>6/18/2022</a:t>
+              <a:t>3/23/2024</a:t>
             </a:fld>
             <a:endParaRPr lang="en-US"/>
           </a:p>
@@ -2100,7 +2100,7 @@
           </a:lstStyle>
           <a:p>
             <a:r>
-              <a:rPr lang="en-US" altLang="zh-TW" smtClean="0"/>
+              <a:rPr lang="en-US" altLang="zh-TW"/>
               <a:t>Click to edit Master title style</a:t>
             </a:r>
             <a:endParaRPr lang="zh-TW" altLang="en-US"/>
@@ -2157,35 +2157,35 @@
           <a:p>
             <a:pPr lvl="0"/>
             <a:r>
-              <a:rPr lang="en-US" altLang="zh-TW" smtClean="0"/>
+              <a:rPr lang="en-US" altLang="zh-TW"/>
               <a:t>Edit Master text styles</a:t>
             </a:r>
           </a:p>
           <a:p>
             <a:pPr lvl="1"/>
             <a:r>
-              <a:rPr lang="en-US" altLang="zh-TW" smtClean="0"/>
+              <a:rPr lang="en-US" altLang="zh-TW"/>
               <a:t>Second level</a:t>
             </a:r>
           </a:p>
           <a:p>
             <a:pPr lvl="2"/>
             <a:r>
-              <a:rPr lang="en-US" altLang="zh-TW" smtClean="0"/>
+              <a:rPr lang="en-US" altLang="zh-TW"/>
               <a:t>Third level</a:t>
             </a:r>
           </a:p>
           <a:p>
             <a:pPr lvl="3"/>
             <a:r>
-              <a:rPr lang="en-US" altLang="zh-TW" smtClean="0"/>
+              <a:rPr lang="en-US" altLang="zh-TW"/>
               <a:t>Fourth level</a:t>
             </a:r>
           </a:p>
           <a:p>
             <a:pPr lvl="4"/>
             <a:r>
-              <a:rPr lang="en-US" altLang="zh-TW" smtClean="0"/>
+              <a:rPr lang="en-US" altLang="zh-TW"/>
               <a:t>Fifth level</a:t>
             </a:r>
             <a:endParaRPr lang="zh-TW" altLang="en-US"/>
@@ -2251,7 +2251,7 @@
           <a:p>
             <a:pPr lvl="0"/>
             <a:r>
-              <a:rPr lang="en-US" altLang="zh-TW" smtClean="0"/>
+              <a:rPr lang="en-US" altLang="zh-TW"/>
               <a:t>Edit Master text styles</a:t>
             </a:r>
           </a:p>
@@ -2274,7 +2274,7 @@
           <a:p>
             <a:fld id="{2135634C-2FAC-4703-B651-C048B2E56F83}" type="datetimeFigureOut">
               <a:rPr lang="en-US" smtClean="0"/>
-              <a:t>6/18/2022</a:t>
+              <a:t>3/23/2024</a:t>
             </a:fld>
             <a:endParaRPr lang="en-US"/>
           </a:p>
@@ -2377,7 +2377,7 @@
           </a:lstStyle>
           <a:p>
             <a:r>
-              <a:rPr lang="en-US" altLang="zh-TW" smtClean="0"/>
+              <a:rPr lang="en-US" altLang="zh-TW"/>
               <a:t>Click to edit Master title style</a:t>
             </a:r>
             <a:endParaRPr lang="zh-TW" altLang="en-US"/>
@@ -2442,7 +2442,7 @@
           </a:lstStyle>
           <a:p>
             <a:r>
-              <a:rPr lang="en-US" altLang="zh-TW" smtClean="0"/>
+              <a:rPr lang="en-US" altLang="zh-TW"/>
               <a:t>Click icon to add picture</a:t>
             </a:r>
             <a:endParaRPr lang="zh-TW" altLang="en-US"/>
@@ -2508,7 +2508,7 @@
           <a:p>
             <a:pPr lvl="0"/>
             <a:r>
-              <a:rPr lang="en-US" altLang="zh-TW" smtClean="0"/>
+              <a:rPr lang="en-US" altLang="zh-TW"/>
               <a:t>Edit Master text styles</a:t>
             </a:r>
           </a:p>
@@ -2531,7 +2531,7 @@
           <a:p>
             <a:fld id="{2135634C-2FAC-4703-B651-C048B2E56F83}" type="datetimeFigureOut">
               <a:rPr lang="en-US" smtClean="0"/>
-              <a:t>6/18/2022</a:t>
+              <a:t>3/23/2024</a:t>
             </a:fld>
             <a:endParaRPr lang="en-US"/>
           </a:p>
@@ -2645,10 +2645,9 @@
           <a:lstStyle/>
           <a:p>
             <a:r>
-              <a:rPr lang="zh-TW" altLang="en-US" smtClean="0"/>
+              <a:rPr lang="zh-TW" altLang="en-US"/>
               <a:t>按一下以編輯母片標題樣式</a:t>
             </a:r>
-            <a:endParaRPr lang="zh-TW" altLang="en-US"/>
           </a:p>
         </p:txBody>
       </p:sp>
@@ -2679,38 +2678,37 @@
           <a:p>
             <a:pPr lvl="0"/>
             <a:r>
-              <a:rPr lang="zh-TW" altLang="en-US" smtClean="0"/>
+              <a:rPr lang="zh-TW" altLang="en-US"/>
               <a:t>按一下以編輯母片文字樣式</a:t>
             </a:r>
           </a:p>
           <a:p>
             <a:pPr lvl="1"/>
             <a:r>
-              <a:rPr lang="zh-TW" altLang="en-US" smtClean="0"/>
+              <a:rPr lang="zh-TW" altLang="en-US"/>
               <a:t>第二層</a:t>
             </a:r>
           </a:p>
           <a:p>
             <a:pPr lvl="2"/>
             <a:r>
-              <a:rPr lang="zh-TW" altLang="en-US" smtClean="0"/>
+              <a:rPr lang="zh-TW" altLang="en-US"/>
               <a:t>第三層</a:t>
             </a:r>
           </a:p>
           <a:p>
             <a:pPr lvl="3"/>
             <a:r>
-              <a:rPr lang="zh-TW" altLang="en-US" smtClean="0"/>
+              <a:rPr lang="zh-TW" altLang="en-US"/>
               <a:t>第四層</a:t>
             </a:r>
           </a:p>
           <a:p>
             <a:pPr lvl="4"/>
             <a:r>
-              <a:rPr lang="zh-TW" altLang="en-US" smtClean="0"/>
+              <a:rPr lang="zh-TW" altLang="en-US"/>
               <a:t>第五層</a:t>
             </a:r>
-            <a:endParaRPr lang="zh-TW" altLang="en-US"/>
           </a:p>
         </p:txBody>
       </p:sp>
@@ -2749,7 +2747,7 @@
           <a:p>
             <a:fld id="{2135634C-2FAC-4703-B651-C048B2E56F83}" type="datetimeFigureOut">
               <a:rPr lang="en-US" smtClean="0"/>
-              <a:t>6/18/2022</a:t>
+              <a:t>3/23/2024</a:t>
             </a:fld>
             <a:endParaRPr lang="en-US"/>
           </a:p>
@@ -3161,24 +3159,7 @@
                 <a:latin typeface="微軟正黑體" pitchFamily="34" charset="-120"/>
                 <a:ea typeface="微軟正黑體" pitchFamily="34" charset="-120"/>
               </a:rPr>
-              <a:t>神</a:t>
-            </a:r>
-            <a:r>
-              <a:rPr lang="zh-TW" altLang="en-US" sz="7200" b="1" i="1" dirty="0">
-                <a:solidFill>
-                  <a:srgbClr val="660033"/>
-                </a:solidFill>
-                <a:effectLst>
-                  <a:outerShdw blurRad="38100" dist="38100" dir="2700000" algn="tl">
-                    <a:srgbClr val="000000">
-                      <a:alpha val="43137"/>
-                    </a:srgbClr>
-                  </a:outerShdw>
-                </a:effectLst>
-                <a:latin typeface="微軟正黑體" pitchFamily="34" charset="-120"/>
-                <a:ea typeface="微軟正黑體" pitchFamily="34" charset="-120"/>
-              </a:rPr>
-              <a:t>羔羊是萬王之王</a:t>
+              <a:t>神羔羊是萬王之王</a:t>
             </a:r>
           </a:p>
         </p:txBody>
@@ -3289,7 +3270,7 @@
         <p:spPr>
           <a:xfrm>
             <a:off x="0" y="5157192"/>
-            <a:ext cx="12192000" cy="748988"/>
+            <a:ext cx="12192000" cy="646331"/>
           </a:xfrm>
           <a:prstGeom prst="rect">
             <a:avLst/>
@@ -3304,7 +3285,7 @@
           <a:p>
             <a:pPr algn="ctr"/>
             <a:r>
-              <a:rPr lang="en-US" sz="4267" b="1" dirty="0">
+              <a:rPr lang="en-US" sz="3600" b="1" dirty="0">
                 <a:solidFill>
                   <a:srgbClr val="660033"/>
                 </a:solidFill>
@@ -3314,17 +3295,17 @@
               <a:t>( </a:t>
             </a:r>
             <a:r>
-              <a:rPr lang="zh-CN" altLang="en-US" sz="4267" b="1" dirty="0">
+              <a:rPr lang="zh-CN" altLang="en-US" sz="3600" b="1" dirty="0">
                 <a:solidFill>
                   <a:srgbClr val="660033"/>
                 </a:solidFill>
                 <a:latin typeface="Microsoft JhengHei" panose="020B0604030504040204" pitchFamily="34" charset="-120"/>
                 <a:ea typeface="Microsoft JhengHei" panose="020B0604030504040204" pitchFamily="34" charset="-120"/>
               </a:rPr>
-              <a:t>正</a:t>
-            </a:r>
-            <a:r>
-              <a:rPr lang="en-US" sz="4267" b="1" dirty="0">
+              <a:t>正歌</a:t>
+            </a:r>
+            <a:r>
+              <a:rPr lang="en-US" sz="3600" b="1" dirty="0">
                 <a:solidFill>
                   <a:srgbClr val="660033"/>
                 </a:solidFill>
@@ -3333,7 +3314,7 @@
               </a:rPr>
               <a:t> )</a:t>
             </a:r>
-            <a:endParaRPr lang="vi-VN" sz="4267" b="1" dirty="0">
+            <a:endParaRPr lang="vi-VN" sz="3600" b="1" dirty="0">
               <a:solidFill>
                 <a:srgbClr val="660033"/>
               </a:solidFill>
@@ -3448,7 +3429,7 @@
         <p:spPr>
           <a:xfrm>
             <a:off x="0" y="5157192"/>
-            <a:ext cx="12192000" cy="748988"/>
+            <a:ext cx="12192000" cy="646331"/>
           </a:xfrm>
           <a:prstGeom prst="rect">
             <a:avLst/>
@@ -3463,7 +3444,7 @@
           <a:p>
             <a:pPr algn="ctr"/>
             <a:r>
-              <a:rPr lang="en-US" sz="4267" b="1" dirty="0">
+              <a:rPr lang="en-US" sz="3600" b="1" dirty="0">
                 <a:solidFill>
                   <a:srgbClr val="660033"/>
                 </a:solidFill>
@@ -3473,26 +3454,26 @@
               <a:t>( </a:t>
             </a:r>
             <a:r>
-              <a:rPr lang="zh-CN" altLang="en-US" sz="4267" b="1" dirty="0">
+              <a:rPr lang="zh-CN" altLang="en-US" sz="3600" b="1" dirty="0">
                 <a:solidFill>
                   <a:srgbClr val="660033"/>
                 </a:solidFill>
                 <a:latin typeface="Microsoft JhengHei" panose="020B0604030504040204" pitchFamily="34" charset="-120"/>
                 <a:ea typeface="Microsoft JhengHei" panose="020B0604030504040204" pitchFamily="34" charset="-120"/>
               </a:rPr>
-              <a:t>正</a:t>
-            </a:r>
-            <a:r>
-              <a:rPr lang="en-US" sz="4267" b="1" dirty="0">
+              <a:t>正歌 </a:t>
+            </a:r>
+            <a:r>
+              <a:rPr lang="en-US" sz="3600" b="1" dirty="0">
                 <a:solidFill>
                   <a:srgbClr val="660033"/>
                 </a:solidFill>
                 <a:latin typeface="Microsoft JhengHei" panose="020B0604030504040204" pitchFamily="34" charset="-120"/>
                 <a:ea typeface="Microsoft JhengHei" panose="020B0604030504040204" pitchFamily="34" charset="-120"/>
               </a:rPr>
-              <a:t> )</a:t>
-            </a:r>
-            <a:endParaRPr lang="vi-VN" sz="4267" b="1" dirty="0">
+              <a:t>)</a:t>
+            </a:r>
+            <a:endParaRPr lang="vi-VN" sz="3600" b="1" dirty="0">
               <a:solidFill>
                 <a:srgbClr val="660033"/>
               </a:solidFill>
@@ -3607,7 +3588,7 @@
         <p:spPr>
           <a:xfrm>
             <a:off x="0" y="5157192"/>
-            <a:ext cx="12192000" cy="748988"/>
+            <a:ext cx="12192000" cy="646331"/>
           </a:xfrm>
           <a:prstGeom prst="rect">
             <a:avLst/>
@@ -3622,7 +3603,7 @@
           <a:p>
             <a:pPr algn="ctr"/>
             <a:r>
-              <a:rPr lang="en-US" sz="4267" b="1" dirty="0">
+              <a:rPr lang="en-US" sz="3600" b="1" dirty="0">
                 <a:solidFill>
                   <a:srgbClr val="660033"/>
                 </a:solidFill>
@@ -3632,26 +3613,26 @@
               <a:t>( </a:t>
             </a:r>
             <a:r>
-              <a:rPr lang="zh-CN" altLang="en-US" sz="4267" b="1" dirty="0">
+              <a:rPr lang="zh-CN" altLang="en-US" sz="3600" b="1" dirty="0">
                 <a:solidFill>
                   <a:srgbClr val="660033"/>
                 </a:solidFill>
                 <a:latin typeface="Microsoft JhengHei" panose="020B0604030504040204" pitchFamily="34" charset="-120"/>
                 <a:ea typeface="Microsoft JhengHei" panose="020B0604030504040204" pitchFamily="34" charset="-120"/>
               </a:rPr>
-              <a:t>副</a:t>
-            </a:r>
-            <a:r>
-              <a:rPr lang="en-US" sz="4267" b="1" dirty="0">
+              <a:t>副歌 </a:t>
+            </a:r>
+            <a:r>
+              <a:rPr lang="en-US" sz="3600" b="1" dirty="0">
                 <a:solidFill>
                   <a:srgbClr val="660033"/>
                 </a:solidFill>
                 <a:latin typeface="Microsoft JhengHei" panose="020B0604030504040204" pitchFamily="34" charset="-120"/>
                 <a:ea typeface="Microsoft JhengHei" panose="020B0604030504040204" pitchFamily="34" charset="-120"/>
               </a:rPr>
-              <a:t> )</a:t>
-            </a:r>
-            <a:endParaRPr lang="vi-VN" sz="4267" b="1" dirty="0">
+              <a:t>)</a:t>
+            </a:r>
+            <a:endParaRPr lang="vi-VN" sz="3600" b="1" dirty="0">
               <a:solidFill>
                 <a:srgbClr val="660033"/>
               </a:solidFill>
@@ -3766,7 +3747,7 @@
         <p:spPr>
           <a:xfrm>
             <a:off x="0" y="5157192"/>
-            <a:ext cx="12192000" cy="748988"/>
+            <a:ext cx="12192000" cy="646331"/>
           </a:xfrm>
           <a:prstGeom prst="rect">
             <a:avLst/>
@@ -3781,7 +3762,7 @@
           <a:p>
             <a:pPr algn="ctr"/>
             <a:r>
-              <a:rPr lang="en-US" sz="4267" b="1" dirty="0">
+              <a:rPr lang="en-US" sz="3600" b="1" dirty="0">
                 <a:solidFill>
                   <a:srgbClr val="660033"/>
                 </a:solidFill>
@@ -3791,26 +3772,26 @@
               <a:t>( </a:t>
             </a:r>
             <a:r>
-              <a:rPr lang="zh-CN" altLang="en-US" sz="4267" b="1" dirty="0">
+              <a:rPr lang="zh-CN" altLang="en-US" sz="3600" b="1" dirty="0">
                 <a:solidFill>
                   <a:srgbClr val="660033"/>
                 </a:solidFill>
                 <a:latin typeface="Microsoft JhengHei" panose="020B0604030504040204" pitchFamily="34" charset="-120"/>
                 <a:ea typeface="Microsoft JhengHei" panose="020B0604030504040204" pitchFamily="34" charset="-120"/>
               </a:rPr>
-              <a:t>副</a:t>
-            </a:r>
-            <a:r>
-              <a:rPr lang="en-US" sz="4267" b="1" dirty="0">
+              <a:t>副歌 </a:t>
+            </a:r>
+            <a:r>
+              <a:rPr lang="en-US" sz="3600" b="1" dirty="0">
                 <a:solidFill>
                   <a:srgbClr val="660033"/>
                 </a:solidFill>
                 <a:latin typeface="Microsoft JhengHei" panose="020B0604030504040204" pitchFamily="34" charset="-120"/>
                 <a:ea typeface="Microsoft JhengHei" panose="020B0604030504040204" pitchFamily="34" charset="-120"/>
               </a:rPr>
-              <a:t> )</a:t>
-            </a:r>
-            <a:endParaRPr lang="vi-VN" sz="4267" b="1" dirty="0">
+              <a:t>)</a:t>
+            </a:r>
+            <a:endParaRPr lang="vi-VN" sz="3600" b="1" dirty="0">
               <a:solidFill>
                 <a:srgbClr val="660033"/>
               </a:solidFill>

--- a/神羔羊是萬王之王.pptx
+++ b/神羔羊是萬王之王.pptx
@@ -308,7 +308,7 @@
           <a:p>
             <a:fld id="{2135634C-2FAC-4703-B651-C048B2E56F83}" type="datetimeFigureOut">
               <a:rPr lang="en-US" smtClean="0"/>
-              <a:t>3/23/2024</a:t>
+              <a:t>7/20/2026</a:t>
             </a:fld>
             <a:endParaRPr lang="en-US"/>
           </a:p>
@@ -478,7 +478,7 @@
           <a:p>
             <a:fld id="{2135634C-2FAC-4703-B651-C048B2E56F83}" type="datetimeFigureOut">
               <a:rPr lang="en-US" smtClean="0"/>
-              <a:t>3/23/2024</a:t>
+              <a:t>7/20/2026</a:t>
             </a:fld>
             <a:endParaRPr lang="en-US"/>
           </a:p>
@@ -658,7 +658,7 @@
           <a:p>
             <a:fld id="{2135634C-2FAC-4703-B651-C048B2E56F83}" type="datetimeFigureOut">
               <a:rPr lang="en-US" smtClean="0"/>
-              <a:t>3/23/2024</a:t>
+              <a:t>7/20/2026</a:t>
             </a:fld>
             <a:endParaRPr lang="en-US"/>
           </a:p>
@@ -828,7 +828,7 @@
           <a:p>
             <a:fld id="{2135634C-2FAC-4703-B651-C048B2E56F83}" type="datetimeFigureOut">
               <a:rPr lang="en-US" smtClean="0"/>
-              <a:t>3/23/2024</a:t>
+              <a:t>7/20/2026</a:t>
             </a:fld>
             <a:endParaRPr lang="en-US"/>
           </a:p>
@@ -1074,7 +1074,7 @@
           <a:p>
             <a:fld id="{2135634C-2FAC-4703-B651-C048B2E56F83}" type="datetimeFigureOut">
               <a:rPr lang="en-US" smtClean="0"/>
-              <a:t>3/23/2024</a:t>
+              <a:t>7/20/2026</a:t>
             </a:fld>
             <a:endParaRPr lang="en-US"/>
           </a:p>
@@ -1362,7 +1362,7 @@
           <a:p>
             <a:fld id="{2135634C-2FAC-4703-B651-C048B2E56F83}" type="datetimeFigureOut">
               <a:rPr lang="en-US" smtClean="0"/>
-              <a:t>3/23/2024</a:t>
+              <a:t>7/20/2026</a:t>
             </a:fld>
             <a:endParaRPr lang="en-US"/>
           </a:p>
@@ -1784,7 +1784,7 @@
           <a:p>
             <a:fld id="{2135634C-2FAC-4703-B651-C048B2E56F83}" type="datetimeFigureOut">
               <a:rPr lang="en-US" smtClean="0"/>
-              <a:t>3/23/2024</a:t>
+              <a:t>7/20/2026</a:t>
             </a:fld>
             <a:endParaRPr lang="en-US"/>
           </a:p>
@@ -1902,7 +1902,7 @@
           <a:p>
             <a:fld id="{2135634C-2FAC-4703-B651-C048B2E56F83}" type="datetimeFigureOut">
               <a:rPr lang="en-US" smtClean="0"/>
-              <a:t>3/23/2024</a:t>
+              <a:t>7/20/2026</a:t>
             </a:fld>
             <a:endParaRPr lang="en-US"/>
           </a:p>
@@ -1997,7 +1997,7 @@
           <a:p>
             <a:fld id="{2135634C-2FAC-4703-B651-C048B2E56F83}" type="datetimeFigureOut">
               <a:rPr lang="en-US" smtClean="0"/>
-              <a:t>3/23/2024</a:t>
+              <a:t>7/20/2026</a:t>
             </a:fld>
             <a:endParaRPr lang="en-US"/>
           </a:p>
@@ -2274,7 +2274,7 @@
           <a:p>
             <a:fld id="{2135634C-2FAC-4703-B651-C048B2E56F83}" type="datetimeFigureOut">
               <a:rPr lang="en-US" smtClean="0"/>
-              <a:t>3/23/2024</a:t>
+              <a:t>7/20/2026</a:t>
             </a:fld>
             <a:endParaRPr lang="en-US"/>
           </a:p>
@@ -2531,7 +2531,7 @@
           <a:p>
             <a:fld id="{2135634C-2FAC-4703-B651-C048B2E56F83}" type="datetimeFigureOut">
               <a:rPr lang="en-US" smtClean="0"/>
-              <a:t>3/23/2024</a:t>
+              <a:t>7/20/2026</a:t>
             </a:fld>
             <a:endParaRPr lang="en-US"/>
           </a:p>
@@ -2747,7 +2747,7 @@
           <a:p>
             <a:fld id="{2135634C-2FAC-4703-B651-C048B2E56F83}" type="datetimeFigureOut">
               <a:rPr lang="en-US" smtClean="0"/>
-              <a:t>3/23/2024</a:t>
+              <a:t>7/20/2026</a:t>
             </a:fld>
             <a:endParaRPr lang="en-US"/>
           </a:p>
@@ -3249,7 +3249,27 @@
                 <a:latin typeface="Microsoft JhengHei" panose="020B0604030504040204" pitchFamily="34" charset="-120"/>
                 <a:ea typeface="Microsoft JhengHei" panose="020B0604030504040204" pitchFamily="34" charset="-120"/>
               </a:rPr>
-              <a:t>榮耀全能都歸羔羊</a:t>
+              <a:t>榮耀</a:t>
+            </a:r>
+            <a:r>
+              <a:rPr lang="zh-CN" altLang="en-US" sz="6400" b="1" dirty="0">
+                <a:solidFill>
+                  <a:srgbClr val="660033"/>
+                </a:solidFill>
+                <a:latin typeface="Microsoft JhengHei" panose="020B0604030504040204" pitchFamily="34" charset="-120"/>
+                <a:ea typeface="Microsoft JhengHei" panose="020B0604030504040204" pitchFamily="34" charset="-120"/>
+              </a:rPr>
+              <a:t>權</a:t>
+            </a:r>
+            <a:r>
+              <a:rPr lang="zh-TW" altLang="en-US" sz="6400" b="1" dirty="0">
+                <a:solidFill>
+                  <a:srgbClr val="660033"/>
+                </a:solidFill>
+                <a:latin typeface="Microsoft JhengHei" panose="020B0604030504040204" pitchFamily="34" charset="-120"/>
+                <a:ea typeface="Microsoft JhengHei" panose="020B0604030504040204" pitchFamily="34" charset="-120"/>
+              </a:rPr>
+              <a:t>能都歸羔羊</a:t>
             </a:r>
             <a:endParaRPr lang="en-US" altLang="zh-TW" sz="6400" b="1" dirty="0">
               <a:solidFill>
